--- a/2023-11-22 Prog tételek/Egyszerű programozási tételek.pptx
+++ b/2023-11-22 Prog tételek/Egyszerű programozási tételek.pptx
@@ -212,7 +212,7 @@
           <a:p>
             <a:fld id="{5A9DAECE-B911-4DA8-8DCD-552D874F2436}" type="datetimeFigureOut">
               <a:rPr lang="hu-HU" smtClean="0"/>
-              <a:t>2023. 11. 22.</a:t>
+              <a:t>2023.11.27</a:t>
             </a:fld>
             <a:endParaRPr lang="hu-HU"/>
           </a:p>
@@ -621,7 +621,7 @@
           <a:p>
             <a:fld id="{4B4B2C5E-F01B-498B-8B64-3A9734A39C72}" type="datetimeFigureOut">
               <a:rPr lang="hu-HU" smtClean="0"/>
-              <a:t>2023. 11. 22.</a:t>
+              <a:t>2023.11.27</a:t>
             </a:fld>
             <a:endParaRPr lang="hu-HU"/>
           </a:p>
@@ -823,7 +823,7 @@
           <a:p>
             <a:fld id="{4B4B2C5E-F01B-498B-8B64-3A9734A39C72}" type="datetimeFigureOut">
               <a:rPr lang="hu-HU" smtClean="0"/>
-              <a:t>2023. 11. 22.</a:t>
+              <a:t>2023.11.27</a:t>
             </a:fld>
             <a:endParaRPr lang="hu-HU"/>
           </a:p>
@@ -1030,7 +1030,7 @@
           <a:p>
             <a:fld id="{4B4B2C5E-F01B-498B-8B64-3A9734A39C72}" type="datetimeFigureOut">
               <a:rPr lang="hu-HU" smtClean="0"/>
-              <a:t>2023. 11. 22.</a:t>
+              <a:t>2023.11.27</a:t>
             </a:fld>
             <a:endParaRPr lang="hu-HU"/>
           </a:p>
@@ -1240,7 +1240,7 @@
           <a:p>
             <a:fld id="{4B4B2C5E-F01B-498B-8B64-3A9734A39C72}" type="datetimeFigureOut">
               <a:rPr lang="hu-HU" smtClean="0"/>
-              <a:t>2023. 11. 22.</a:t>
+              <a:t>2023.11.27</a:t>
             </a:fld>
             <a:endParaRPr lang="hu-HU"/>
           </a:p>
@@ -1513,7 +1513,7 @@
           <a:p>
             <a:fld id="{4B4B2C5E-F01B-498B-8B64-3A9734A39C72}" type="datetimeFigureOut">
               <a:rPr lang="hu-HU" smtClean="0"/>
-              <a:t>2023. 11. 22.</a:t>
+              <a:t>2023.11.27</a:t>
             </a:fld>
             <a:endParaRPr lang="hu-HU"/>
           </a:p>
@@ -1775,7 +1775,7 @@
           <a:p>
             <a:fld id="{4B4B2C5E-F01B-498B-8B64-3A9734A39C72}" type="datetimeFigureOut">
               <a:rPr lang="hu-HU" smtClean="0"/>
-              <a:t>2023. 11. 22.</a:t>
+              <a:t>2023.11.27</a:t>
             </a:fld>
             <a:endParaRPr lang="hu-HU"/>
           </a:p>
@@ -2178,7 +2178,7 @@
           <a:p>
             <a:fld id="{4B4B2C5E-F01B-498B-8B64-3A9734A39C72}" type="datetimeFigureOut">
               <a:rPr lang="hu-HU" smtClean="0"/>
-              <a:t>2023. 11. 22.</a:t>
+              <a:t>2023.11.27</a:t>
             </a:fld>
             <a:endParaRPr lang="hu-HU"/>
           </a:p>
@@ -2320,7 +2320,7 @@
           <a:p>
             <a:fld id="{4B4B2C5E-F01B-498B-8B64-3A9734A39C72}" type="datetimeFigureOut">
               <a:rPr lang="hu-HU" smtClean="0"/>
-              <a:t>2023. 11. 22.</a:t>
+              <a:t>2023.11.27</a:t>
             </a:fld>
             <a:endParaRPr lang="hu-HU"/>
           </a:p>
@@ -2439,7 +2439,7 @@
           <a:p>
             <a:fld id="{4B4B2C5E-F01B-498B-8B64-3A9734A39C72}" type="datetimeFigureOut">
               <a:rPr lang="hu-HU" smtClean="0"/>
-              <a:t>2023. 11. 22.</a:t>
+              <a:t>2023.11.27</a:t>
             </a:fld>
             <a:endParaRPr lang="hu-HU"/>
           </a:p>
@@ -2746,7 +2746,7 @@
           <a:p>
             <a:fld id="{4B4B2C5E-F01B-498B-8B64-3A9734A39C72}" type="datetimeFigureOut">
               <a:rPr lang="hu-HU" smtClean="0"/>
-              <a:t>2023. 11. 22.</a:t>
+              <a:t>2023.11.27</a:t>
             </a:fld>
             <a:endParaRPr lang="hu-HU"/>
           </a:p>
@@ -3033,7 +3033,7 @@
           <a:p>
             <a:fld id="{4B4B2C5E-F01B-498B-8B64-3A9734A39C72}" type="datetimeFigureOut">
               <a:rPr lang="hu-HU" smtClean="0"/>
-              <a:t>2023. 11. 22.</a:t>
+              <a:t>2023.11.27</a:t>
             </a:fld>
             <a:endParaRPr lang="hu-HU"/>
           </a:p>
@@ -3937,7 +3937,7 @@
             </a:pPr>
             <a:r>
               <a:rPr lang="hu-HU" dirty="0"/>
-              <a:t>Hasonlít a kiválasztáshoz, de annál biztonságosabb: Annak eldöntése, hogy egy „n” elemű sorozat (tömb) elemi között van-e olyan, ami megfelel a megadott (F) feltételnek, ha igen, akkor hányadik.</a:t>
+              <a:t>Hasonlít a kiválasztáshoz, de annál biztonságosabb: Annak eldöntése, hogy egy „n” elemű sorozat (tömb) elemei között van-e olyan, ami megfelel a megadott (F) feltételnek, ha igen, akkor hányadik.</a:t>
             </a:r>
           </a:p>
           <a:p>
@@ -4976,21 +4976,7 @@
                 <a:latin typeface="Courier New" panose="02070309020205020404" pitchFamily="49" charset="0"/>
                 <a:cs typeface="Courier New" panose="02070309020205020404" pitchFamily="49" charset="0"/>
               </a:rPr>
-              <a:t>    s := </a:t>
-            </a:r>
-            <a:r>
-              <a:rPr lang="hu-HU" b="1" dirty="0" err="1">
-                <a:latin typeface="Courier New" panose="02070309020205020404" pitchFamily="49" charset="0"/>
-                <a:cs typeface="Courier New" panose="02070309020205020404" pitchFamily="49" charset="0"/>
-              </a:rPr>
-              <a:t>s</a:t>
-            </a:r>
-            <a:r>
-              <a:rPr lang="hu-HU" b="1" dirty="0">
-                <a:latin typeface="Courier New" panose="02070309020205020404" pitchFamily="49" charset="0"/>
-                <a:cs typeface="Courier New" panose="02070309020205020404" pitchFamily="49" charset="0"/>
-              </a:rPr>
-              <a:t> + T[i]</a:t>
+              <a:t>    s := s * T[i]</a:t>
             </a:r>
           </a:p>
           <a:p>
@@ -5463,7 +5449,7 @@
             </a:pPr>
             <a:r>
               <a:rPr lang="hu-HU" dirty="0"/>
-              <a:t>Annak eldöntése, hogy egy „n” elemű sorozat (tömb) elemi között van-e olyan, ami megfelel a megadott (F) feltételnek.</a:t>
+              <a:t>Annak eldöntése, hogy egy „n” elemű sorozat (tömb) elemei között van-e olyan, ami megfelel a megadott (F) feltételnek.</a:t>
             </a:r>
           </a:p>
           <a:p>
@@ -7172,7 +7158,7 @@
             </a:r>
             <a:r>
               <a:rPr lang="hu-HU" dirty="0"/>
-              <a:t>:a sorozat elemei között értelmezhető a kisebb-nagyobb reláció.</a:t>
+              <a:t>: a sorozat elemei között értelmezhető a kisebb-nagyobb reláció.</a:t>
             </a:r>
           </a:p>
           <a:p>
